--- a/slides/11_Trends_and_Relationships.pptx
+++ b/slides/11_Trends_and_Relationships.pptx
@@ -129,7 +129,7 @@
   <p:extLst>
     <p:ext uri="{521415D9-36F7-43E2-AB2F-B90AF26B5E84}">
       <p14:sectionLst xmlns:p14="http://schemas.microsoft.com/office/powerpoint/2010/main">
-        <p14:section name="Introduction" id="{da64dce0-7be9-050f-84ec-94e1b59229c0}">
+        <p14:section name="Introduction" id="{756e0702-f811-daad-3d73-e58d1dcf8324}">
           <p14:sldIdLst>
             <p14:sldId id="256"/>
             <p14:sldId id="257"/>
@@ -137,7 +137,7 @@
             <p14:sldId id="259"/>
           </p14:sldIdLst>
         </p14:section>
-        <p14:section name="Summarising by two columns" id="{1646677d-c1d4-1072-41c8-1d8bf64e3237}">
+        <p14:section name="Summarising by two columns" id="{44d8cf85-361c-6ac3-e122-1b2196013255}">
           <p14:sldIdLst>
             <p14:sldId id="260"/>
             <p14:sldId id="261"/>
@@ -145,7 +145,7 @@
             <p14:sldId id="263"/>
           </p14:sldIdLst>
         </p14:section>
-        <p14:section name="Trends over time" id="{e34cf940-3e7d-dba2-299a-368d2b2d89eb}">
+        <p14:section name="Trends over time" id="{1a28ddda-ea30-b3ac-3359-ca51c4ab3f24}">
           <p14:sldIdLst>
             <p14:sldId id="264"/>
             <p14:sldId id="265"/>
@@ -157,7 +157,7 @@
             <p14:sldId id="271"/>
           </p14:sldIdLst>
         </p14:section>
-        <p14:section name="Looking for a relationship" id="{e3740332-5fba-6092-c573-bfffa339bda1}">
+        <p14:section name="Looking for a relationship" id="{4459581d-9588-6847-e4be-88d66bd7d254}">
           <p14:sldIdLst>
             <p14:sldId id="272"/>
             <p14:sldId id="273"/>
@@ -166,7 +166,7 @@
             <p14:sldId id="276"/>
           </p14:sldIdLst>
         </p14:section>
-        <p14:section name="Wrap up" id="{53d7107a-45b1-c4e6-642d-995defb90b49}">
+        <p14:section name="Wrap up" id="{35a789bb-4776-1e04-52cd-7cf333090824}">
           <p14:sldIdLst>
             <p14:sldId id="277"/>
             <p14:sldId id="278"/>
@@ -4124,7 +4124,7 @@
               <a:t> Time goes on the x-axis and the median review score on the y-axis, with one line per group. </a:t>
             </a:r>
             <a:r>
-              <a:rPr lang="en-US" sz="1300" dirty="0">
+              <a:rPr lang="en-US" sz="1300" b="1" dirty="0">
                 <a:solidFill>
                   <a:srgbClr val="B86E1E"/>
                 </a:solidFill>
@@ -5034,7 +5034,7 @@
               <a:t>Change </a:t>
             </a:r>
             <a:r>
-              <a:rPr lang="en-US" sz="1800" dirty="0">
+              <a:rPr lang="en-US" sz="1800" b="1" dirty="0">
                 <a:solidFill>
                   <a:srgbClr val="B86E1E"/>
                 </a:solidFill>
@@ -5053,7 +5053,7 @@
               <a:t> to </a:t>
             </a:r>
             <a:r>
-              <a:rPr lang="en-US" sz="1800" dirty="0">
+              <a:rPr lang="en-US" sz="1800" b="1" dirty="0">
                 <a:solidFill>
                   <a:srgbClr val="B86E1E"/>
                 </a:solidFill>
@@ -5099,7 +5099,7 @@
               <a:t>Change </a:t>
             </a:r>
             <a:r>
-              <a:rPr lang="en-US" sz="1800" dirty="0">
+              <a:rPr lang="en-US" sz="1800" b="1" dirty="0">
                 <a:solidFill>
                   <a:srgbClr val="B86E1E"/>
                 </a:solidFill>
@@ -5118,7 +5118,7 @@
               <a:t> to </a:t>
             </a:r>
             <a:r>
-              <a:rPr lang="en-US" sz="1800" dirty="0">
+              <a:rPr lang="en-US" sz="1800" b="1" dirty="0">
                 <a:solidFill>
                   <a:srgbClr val="B86E1E"/>
                 </a:solidFill>
@@ -5164,7 +5164,7 @@
               <a:t>Remove the </a:t>
             </a:r>
             <a:r>
-              <a:rPr lang="en-US" sz="1800" dirty="0">
+              <a:rPr lang="en-US" sz="1800" b="1" dirty="0">
                 <a:solidFill>
                   <a:srgbClr val="B86E1E"/>
                 </a:solidFill>
@@ -6601,7 +6601,7 @@
               <a:t>We use </a:t>
             </a:r>
             <a:r>
-              <a:rPr lang="en-US" sz="1300" dirty="0">
+              <a:rPr lang="en-US" sz="1300" b="1" dirty="0">
                 <a:solidFill>
                   <a:srgbClr val="B86E1E"/>
                 </a:solidFill>
@@ -7837,7 +7837,7 @@
               <a:t>Why does </a:t>
             </a:r>
             <a:r>
-              <a:rPr lang="en-US" sz="1800" dirty="0">
+              <a:rPr lang="en-US" sz="1800" b="1" dirty="0">
                 <a:solidFill>
                   <a:srgbClr val="E8A55A"/>
                 </a:solidFill>
@@ -9341,7 +9341,7 @@
               <a:t> We </a:t>
             </a:r>
             <a:r>
-              <a:rPr lang="en-US" sz="1300" dirty="0">
+              <a:rPr lang="en-US" sz="1300" b="1" dirty="0">
                 <a:solidFill>
                   <a:srgbClr val="B86E1E"/>
                 </a:solidFill>
@@ -9376,7 +9376,7 @@
               <a:t> columns at once, </a:t>
             </a:r>
             <a:r>
-              <a:rPr lang="en-US" sz="1300" dirty="0">
+              <a:rPr lang="en-US" sz="1300" b="1" dirty="0">
                 <a:solidFill>
                   <a:srgbClr val="B86E1E"/>
                 </a:solidFill>
@@ -9395,7 +9395,7 @@
               <a:t> and </a:t>
             </a:r>
             <a:r>
-              <a:rPr lang="en-US" sz="1300" dirty="0">
+              <a:rPr lang="en-US" sz="1300" b="1" dirty="0">
                 <a:solidFill>
                   <a:srgbClr val="B86E1E"/>
                 </a:solidFill>
@@ -9645,7 +9645,7 @@
               <a:t> → keeps games released from 2010 to 2024, using </a:t>
             </a:r>
             <a:r>
-              <a:rPr lang="en-US" sz="1800" dirty="0">
+              <a:rPr lang="en-US" sz="1800" b="1" dirty="0">
                 <a:solidFill>
                   <a:srgbClr val="B86E1E"/>
                 </a:solidFill>
@@ -9690,7 +9690,7 @@
               <a:t> → one group for each combination of </a:t>
             </a:r>
             <a:r>
-              <a:rPr lang="en-US" sz="1800" dirty="0">
+              <a:rPr lang="en-US" sz="1800" b="1" dirty="0">
                 <a:solidFill>
                   <a:srgbClr val="B86E1E"/>
                 </a:solidFill>
@@ -9709,7 +9709,7 @@
               <a:t> and </a:t>
             </a:r>
             <a:r>
-              <a:rPr lang="en-US" sz="1800" dirty="0">
+              <a:rPr lang="en-US" sz="1800" b="1" dirty="0">
                 <a:solidFill>
                   <a:srgbClr val="B86E1E"/>
                 </a:solidFill>
